--- a/中期汇报.pptx
+++ b/中期汇报.pptx
@@ -596,12 +596,12 @@
           </a:p>
           <a:p>
             <a:r>
-              <a:t>中期后按编号推进：10 月下旬 FR-12 全量人工核查、FR-16 完整导出；月底性能复测和独立审查；11 月初 FR-18 从 bundle 零起复现、另机验证；13 到 16 日报告、预演、冻结，17 日留空。想请老师确认：没有原单号时，保守推断加资料不足结案是否认可。</a:t>
-            </a:r>
-          </a:p>
-          <a:p>
-            <a:r>
-              <a:t>备查：排期取自执行计划第六节和每日任务草稿，均为计划，不是已发生的结果。11-17 与 10-22 一样只用已冻结版本，不开发、不补测。</a:t>
+              <a:t>中期后先整理老师反馈和我对软件的验收意见，只修实际问题，再补受影响的测试和性能复核；然后做真实候选确认、账户恢复和另一台电脑验证；软件认可后做最终报告、汇报和完整包。11 月 15 日前预演，16 日冻结，17 日留空。想请老师确认：首轮只保守自动，整单和最近一笔只作建议、人确认后才生效，这个口径是否认可。</a:t>
+            </a:r>
+          </a:p>
+          <a:p>
+            <a:r>
+              <a:t>备查：中期后计划已合并、不再逐日分配（执行计划第六节）；中间几步按依赖排序，没有写具体日期。只列 10-23 起的工作。11-17 与 10-22 一样只用已冻结版本，不开发、不补测。TOTP 真机按本人决定跳过。</a:t>
             </a:r>
           </a:p>
         </p:txBody>
@@ -676,12 +676,12 @@
           </a:p>
           <a:p>
             <a:r>
-              <a:t>系统给三类人用：财务派单，仓库核查自己的差异，管理员看全局。难点是取消行没有原订单号，过去只能在表格里逐行筛、手写备注，处理过程追不到。系统把候选、责任人、状态和结论连成一条记录。交易是官方事实，配对是规则推断，处理记录是课程模拟。</a:t>
-            </a:r>
-          </a:p>
-          <a:p>
-            <a:r>
-              <a:t>备查：右图是 10-15 时点的财务总览：year1 初始差异 4,991，当时 1 条已关闭；不代表今天的工单状态，也不是优化后的首屏计时。“替代表格＋备注”是设计目标，没有用户访谈证据。</a:t>
+              <a:t>系统给三类人用：财务派单，仓库核查自己的差异，管理员看全局。难点是取消行没有原订单号，过去靠表格逐行筛，处理过程追不到。系统把候选、责任人、状态和结论连成一条记录，同类差异还能按建议批量复核。交易是官方事实，配对是规则推断，处理记录是课程模拟。</a:t>
+            </a:r>
+          </a:p>
+          <a:p>
+            <a:r>
+              <a:t>备查：右图是最新前端（ac298f6）在开发模拟预览里的财务总览，数字 137 / 96 / 18 / 23 全是模拟数据，只示意界面；不需登录、不连真实库。真实数字见第 2、6 页。“替代表格＋备注”是设计目标，没有用户访谈证据。</a:t>
             </a:r>
           </a:p>
         </p:txBody>
@@ -761,7 +761,7 @@
           </a:p>
           <a:p>
             <a:r>
-              <a:t>备查：year1 = Year 2009-2010 整张表；两表日期有重叠，跨表八字段全同的按出现次数对齐，次表副本排除并链接原记录（CR-05）。243,007 是 all 中缺客户的标记行数（含销售），不是排除数。清洗版本 cr-1.0.1。</a:t>
+              <a:t>备查：year1 = Year 2009-2010 整张表；两表日期有重叠，跨表八字段全同的按出现次数对齐，次表副本排除并链接原记录（CR-05）。243,007 是 all 中缺客户的标记行数（含销售），不是排除数。清洗版本 cr-1.0.1。取消分母不悄悄换：原始可识别取消 19,494，其中 330 行在清洗中排除，余 19,164 进入分类；无法识别单号的排除行不猜作取消。</a:t>
             </a:r>
           </a:p>
         </p:txBody>
@@ -836,12 +836,12 @@
           </a:p>
           <a:p>
             <a:r>
-              <a:t>需求都写成“系统应当……”。FR-01，读官方原件并记下来源和源行号；FR-05，缺身份、多候选或时间不对时不自动确认，生成写明原因的差异；FR-09 和 FR-10，派单记下操作人和时间，已有责任人就拒绝再派。暂时不做的是自动调账和实际退款。</a:t>
-            </a:r>
-          </a:p>
-          <a:p>
-            <a:r>
-              <a:t>备查：规格共 FR-01–FR-18、NR-01–NR-04，48 条 TC；规模数字是本项目原计划目标，不是 v1.2 统一课程下限。右图：派单后 0:182 版本 1→2，操作历史记 finance 与时间。</a:t>
+              <a:t>需求都写成“系统应当……”。FR-01，读官方原件并记下来源和源行号；FR-05，缺身份、多候选或时间不对时不自动确认，生成写明原因的差异；FR-09 和 FR-10，派单记下操作人和时间，已有责任人就拒绝再派，批量时逐条跳过。暂时不做的是自动调账和实际退款。</a:t>
+            </a:r>
+          </a:p>
+          <a:p>
+            <a:r>
+              <a:t>备查：规格共 FR-01–FR-18、NR-01–NR-04；用例原计划 TC-01–48，10-18 为推荐与批量复核补 TC-49–55，编号不重排。规模数字是本项目原计划目标，不是 v1.2 统一课程下限。右图是最新前端的模拟数据：派单后版本 0→1、责任人 warehouse；真实 0:182 派单（v1→2，finance）实拍在 v12中期复核/05。</a:t>
             </a:r>
           </a:p>
         </p:txBody>
@@ -916,12 +916,12 @@
           </a:p>
           <a:p>
             <a:r>
-              <a:t>三条规则。R-02：客户、商品、精确单价、国家一致，销售严格在先、余量够，才算候选。FR-06：只有唯一候选才自动配；右图两条合格候选，就留给人看。R-04：状态按序，关闭必须写结论。保守的原因是没有原单号，配错的代价比留给人核查大。</a:t>
-            </a:r>
-          </a:p>
-          <a:p>
-            <a:r>
-              <a:t>备查：R-03：一条取消最多分给一条销售，累计不超原量（TC-13/14）。year1 覆盖率 5,214 / 10,205 ≈ 51.09%。覆盖率只说明多少取消被自动配上，没有真值，不能叫准确率。0:1378 在 all 范围，本轮只查看，未做人工确认。</a:t>
+              <a:t>四条规则。R-02：客户、商品、单价、国家一致，销售严格在先、余量够，才算候选。FR-06：首轮只有唯一候选才自动配；右图三条合格候选并排对比，系统不挑，留给人看。R-04：状态按序，关闭要写结论。新加的复核建议，比如整单、最近一笔，只是建议，人确认后才生效。因为没有原单号，配错代价更大。</a:t>
+            </a:r>
+          </a:p>
+          <a:p>
+            <a:r>
+              <a:t>备查：R-03：一条取消最多分给一条销售，累计不超原量（TC-13/14）。year1 首轮覆盖率 5,214 / 10,205 ≈ 51.09%。覆盖率只说明多少取消被自动配上，没有真值，不能叫准确率。复核建议：原始八字段完全相同的销售归一组、最早源行为代表、源行不删，组容量只算一次；最近时间并列不预选；整单和共享余量组件原子提交（TC-49–53）。0:1378 在 all 范围，10-16 只查看，未做人工确认。</a:t>
             </a:r>
           </a:p>
         </p:txBody>
@@ -996,12 +996,12 @@
           </a:p>
           <a:p>
             <a:r>
-              <a:t>结构分四层。Python 读官方 Excel，清洗成带源行号的记录；Go 和 Gin 负责配对规则、派单状态和权限；SQLite 保存差异、工单和审计；React 页面做总览、证据和交易检索，筛选分页都在服务端。所有账户先完成强密码和 Passkey 才能进业务页面，角色由服务端会话决定。系统只给推断和记录，不碰资金。</a:t>
-            </a:r>
-          </a:p>
-          <a:p>
-            <a:r>
-              <a:t>备查：技术取舍（D-04）：比较过 FastAPI、Rust、C#、Java，选 Go＋Gin＋SQLite 看重单文件部署和全量并行；没做同条件对比，不说快几倍。工程备查：截至 d3b3700 主线 43 次提交均以 FR 编号开头；实验分支 79ff9b2 未合入；快照 746a7e1 已用 bundle 恢复复现；run-app 技能由新 Codex CLI 进程显式调用、退出码 0（v12中期复核/16 图，是输出摘录的浏览器展示）。</a:t>
+              <a:t>结构分四层。Python 读官方 Excel，清洗成带源行号的记录；Go 和 Gin 负责首轮配对、复核建议、派单状态和权限；SQLite 保存差异、余量和审计；React 页面做总览、证据对比、批量工作台和交易检索，筛选分页都在服务端。所有账户先完成强密码和 Passkey 才能进业务页面，角色由服务端会话决定。系统只给推断和记录，不碰资金。</a:t>
+            </a:r>
+          </a:p>
+          <a:p>
+            <a:r>
+              <a:t>备查：技术取舍（D-04）：比较过 FastAPI、Rust、C#、Java，选 Go＋Gin＋SQLite 看重单文件部署和全量并行；没做同条件对比，不说快几倍。工程备查：截至 e2aa569 主线 68 个原生提交均以 FR 编号开头（关键：6ead220 性能与首次引导、b9d8d8d 原因筛选、bc97763 推荐批量复核、eb499f9 工作台修订、ac298f6 自动刷新建议）；实验分支 79ff9b2 未合入；快照 746a7e1 已用 bundle 恢复复现；run-app 技能由新 Codex CLI 进程显式调用、退出码 0（v12中期复核/16 图，是输出摘录的浏览器展示）。</a:t>
             </a:r>
           </a:p>
         </p:txBody>
@@ -1076,12 +1076,12 @@
           </a:p>
           <a:p>
             <a:r>
-              <a:t>这是今天的真实运行，范围 year1。取消行 0:182，数量 4、单价 4.25；同条件的销售 0:191 不严格早于取消，合格候选是 0。以 finance 账户派单、开始处理，写明资料不足后关闭，版本 1 到 4，三条审计，没有新增配对。year1 现在 4988 待处理、3 关闭；全量的 9450 是另一个范围，不混在一起。</a:t>
-            </a:r>
-          </a:p>
-          <a:p>
-            <a:r>
-              <a:t>备查：3 条关闭 = 10-15 的 0:180、0:181 两条旧结案 ＋ 今天的 0:182。本轮是 finance 单角色闭环（自派自处理），不冒充新一次跨角色验证；跨角色画面见 10-15 截图。冷启动后服务新进程首页 200、未登录业务 401，year1 仍 4,988 / 0 / 3（15 图）。点“实机演示”或按 D 打开路线。</a:t>
+              <a:t>运行结果分两层。首轮在官方全量上：一万九千多条接纳取消，自动配上 9714 条，其余进人工核查，初始差异 9450 条。新加的复核建议，在全量的隔离副本上用合成财务账户批量复核：选 5451 条，成功 5237，跳过 214，事务失败 0，分配从 9714 增加到 14951。这是模拟复核，不是我本人审核，也不改首轮的 50.69%。右边是模拟数据界面，只看预览怎样分类。</a:t>
+            </a:r>
+          </a:p>
+          <a:p>
+            <a:r>
+              <a:t>备查：跳过 214 = 容量不足 139 ＋ 未明确选择 74 ＋ 整单方案未完整一致 1。关闭 1 → 5,238，审计 3 → 20,951（新增 5,237 × 4）；91 个重复组、187 个来源成员保留；初始分类与 summary 散列不变，源库 SHA 前后相同。耗时：生成 2.17 s、预览 1.05 s、提交 13.04 s；提交窗口内 4 路 300 次查询 0 失败、P95 52.3 ms，是 TC55 局部诊断，不是正式 NFR04。预览和建议都不占余量、不写业务表。单条主流程（10-16 旧实例）：0:182 派单 → 开始 → 资料不足结案，v1→v4、三条审计、无配对；year1 当时 4,988 / 0 / 3。旧实例保留在本机，未迁入新实例。</a:t>
             </a:r>
           </a:p>
         </p:txBody>
@@ -1156,12 +1156,12 @@
           </a:p>
           <a:p>
             <a:r>
-              <a:t>测试看表。主流程就是刚才的 0:182：预期按序结案、不造配对，实际 v4 加三条审计。边界一，已派给 finance 再派，预期拒绝，实际提示已有责任人，版本仍是 2。边界二，处理中不填结论就关闭，被拒绝，仍是处理中版本 3。多候选 0:1378 也没有自动挑。另外 97 项自动测试 0 失败。</a:t>
-            </a:r>
-          </a:p>
-          <a:p>
-            <a:r>
-              <a:t>备查：97 项是自动回归的统计口径，不等于每项都由本人亲手跑；10-15 本人亲跑截图为当时版本的 71 Go＋13 Python。时间条件 TC-12 在 0:182 上可见：0:191 不严格在先，不算候选。分页边界：客户 13526 共 54 条，分 50＋4 两页、末页“下一页”禁用（11/12 图）；不存在商品返回空结果（14 图）。</a:t>
+              <a:t>测试看表。主流程是 0:182：预期按序结案、不造配对，实际 v4 加三条审计。已派单再派，被拒，版本仍是 2；不填结论就关闭，被拒，仍是版本 3；多候选 0:1378 没有自动挑。批量这边，冲突的组整组跳过，其余照常成功，重放不重复写。最近一次统一回归 161 项 0 失败。</a:t>
+            </a:r>
+          </a:p>
+          <a:p>
+            <a:r>
+              <a:t>备查：161 项是 10-18 12:44 一次统一回归；之后“已关闭隐藏”修订有 131 Go＋6 前端通过、另复跑 3 项相关 Go，Python 25 项复用；跨轮去重 162 项不是一次统一回归，15:12 末次版本未测试。10-16 时为 97 项（76 Go＋15 Python＋6 前端）。这些是代理运行的自动回归，不等于本人亲跑；10-15 本人亲跑截图为当时版本的 71 Go＋13 Python。Passkey 选择登录：三角色合成 ES256 凭据的协议与 HTTP 边界通过，真实设备流程待本人验证。时间条件 TC-12 在 0:182 上可见：0:191 不严格在先，不算候选。分页边界（10-16 year1）：客户 13526 共 54 条，分 50＋4 两页、末页“下一页”禁用（11/12 图）；不存在商品返回空结果（14 图）。</a:t>
             </a:r>
           </a:p>
         </p:txBody>
@@ -1236,12 +1236,12 @@
           </a:p>
           <a:p>
             <a:r>
-              <a:t>一个真实问题：10 月 15 日正式测量时，全量首次要 198 秒，超过 90 秒底线；后台任务时 300 次查询失败 228 次。改成来源索引分页和有界批量事务后，同条件三次最慢 72 秒，查询 0 失败、P95 11.7 毫秒。代价是导入控制更复杂；45 秒和 5 秒的优选目标没到，已决定停止优化。</a:t>
-            </a:r>
-          </a:p>
-          <a:p>
-            <a:r>
-              <a:t>备查：三次首次全量：72.34 / 71.98 / 71.92 s；重算最大 10.96 s；一万行最大 1.84 s；10 路共 300 次真实认证 HTTP。旧失败 198.841174 s 原样保留。AI 工具：开发与验证主要用 Codex，本网页版汇报用 Claude Code 制作；各自用途和关键结果的核验方式写进报告。</a:t>
+              <a:t>一个真实问题：10 月 15 日正式测量，全量首次要 198 秒，超过 90 秒底线；后台任务时 300 次查询失败 228 次。改成来源索引分页和有界批量事务后，10 月 16 日三次最慢 72 秒，17 日收尾单次 67 秒，查询 0 失败。代价是导入控制更复杂；45 秒和 5 秒的优选没到，已停止追优。18 日推荐查询也慢过一次，改成按取消键驱动后 2 秒左右。</a:t>
+            </a:r>
+          </a:p>
+          <a:p>
+            <a:r>
+              <a:t>备查：图中三根柱口径相同、时点不同：10-16 三次 72.34 / 71.98 / 71.92 s 为正式三轮；10-17 的 NFR01 1.74 s、NFR02 67.34 s 是收尾单次，NFR03 5.58 s 复用同核心源码候选 3 的单次证据，不写成三轮。NFR04 十路 300 次全部落在真实后台任务窗内，整体 P95 149.04 ms；UK 类 P95 304.45 ms，未达每类 ≤ 200 ms 优选。10-16 时 P95 11.72 ms 为当时版本，两次不混比。旧失败 198.841174 s 原样保留。另一个真实问题：只读诊断曾因普通路径 mode=ro 未生效，关闭时 checkpoint 使源库物理 SHA 变化，该轮记失败；改用 file URI 并检查驱动只读后复验 SHA 一致。最新原因筛选与末次自动刷新未重测全量性能。AI 工具：开发与验证主要用 Codex，Claude Code 参与前端界面与本汇报；用途与核验方式写进报告。</a:t>
             </a:r>
           </a:p>
         </p:txBody>

--- a/中期汇报.pptx
+++ b/中期汇报.pptx
@@ -547,7 +547,7 @@
 </file>
 
 <file path=ppt/notesSlides/notesSlide10.xml><?xml version="1.0" encoding="utf-8"?>
-<p:notes xmlns:a="http://schemas.openxmlformats.org/drawingml/2006/main" xmlns:p="http://schemas.openxmlformats.org/presentationml/2006/main" xmlns:r="http://schemas.openxmlformats.org/officeDocument/2006/relationships">
+<p:notes xmlns:a="http://schemas.openxmlformats.org/drawingml/2006/main" xmlns:p="http://schemas.openxmlformats.org/presentationml/2006/main">
   <p:cSld>
     <p:spTree>
       <p:nvGrpSpPr>
@@ -596,12 +596,12 @@
           </a:p>
           <a:p>
             <a:r>
-              <a:t>中期后先整理老师反馈和我对软件的验收意见，只修实际问题，再补受影响的测试和性能复核；然后做真实候选确认、账户恢复和另一台电脑验证；软件认可后做最终报告、汇报和完整包。11 月 15 日前预演，16 日冻结，17 日留空。想请老师确认：首轮只保守自动，整单和最近一笔只作建议、人确认后才生效，这个口径是否认可。</a:t>
-            </a:r>
-          </a:p>
-          <a:p>
-            <a:r>
-              <a:t>备查：中期后计划已合并、不再逐日分配（执行计划第六节）；中间几步按依赖排序，没有写具体日期。只列 10-23 起的工作。11-17 与 10-22 一样只用已冻结版本，不开发、不补测。TOTP 真机按本人决定跳过。</a:t>
+              <a:t>10 月 23 日至 11 月 6 日，计划先完善多账户、国家分工和仓库申请审批，再改进人员选择、申请进度及账户安全；之后补齐差异资料核实、补充重算和新问题流转，优化重算后的页面刷新，最后完善退货和销售时间选择及精度校验。原始数据、已配对历史、权限和审计规则保持。</a:t>
+            </a:r>
+          </a:p>
+          <a:p>
+            <a:r>
+              <a:t>备查：七个节点依次覆盖账户管理、国家分工、管理交互、账户安全、差异补充、重算提速和时间选择。批准域名后仍需配置实际 DNS、TLS 与代理；不同域名的 Passkey 分别绑定，旧入口继续兼容。</a:t>
             </a:r>
           </a:p>
         </p:txBody>

--- a/中期汇报.pptx
+++ b/中期汇报.pptx
@@ -1143,7 +1143,7 @@
           </a:p>
           <a:p xmlns:a="http://schemas.openxmlformats.org/drawingml/2006/main">
             <a:r>
-              <a:t>运行结果分两层。首轮在官方全量上：一万九千多条接纳取消，自动配上 9714 条，其余进人工核查，初始差异 9450 条。新加的复核建议，在全量的隔离副本上用合成财务账户批量复核：选 5451 条，成功 5237，跳过 214，事务失败 0，分配从 9714 增加到 14951。这是模拟复核，不是我本人审核，也不改首轮的 50.69%。右边是模拟数据界面，只看预览怎样分类。</a:t>
+              <a:t>运行结果分两层。首轮在官方全量上：一万九千多条接纳取消，自动配上 9714 条，其余进人工核查，初始差异 9450 条。新加的复核建议，在全量的隔离副本上用合成财务账户批量复核：选 5451 条，成功 5237，跳过 214，事务失败 0，分配从 9714 增加到 14951。这是我在隔离环境完成的复核，也不改首轮的 50.69%。右边是模拟数据界面，只看预览怎样分类。</a:t>
             </a:r>
           </a:p>
           <a:p xmlns:a="http://schemas.openxmlformats.org/drawingml/2006/main">
@@ -1228,7 +1228,7 @@
           </a:p>
           <a:p xmlns:a="http://schemas.openxmlformats.org/drawingml/2006/main">
             <a:r>
-              <a:t>备查：161 项是 10-18 12:44 一次统一回归；之后“已关闭隐藏”修订有 131 Go＋6 前端通过、另复跑 3 项相关 Go，Python 25 项复用；跨轮去重 162 项不是一次统一回归，15:12 末次版本未测试。10-16 时为 97 项（76 Go＋15 Python＋6 前端）。这些是代理运行的自动回归，不等于本人亲跑；10-15 本人亲跑截图为当时版本的 71 Go＋13 Python。Passkey 选择登录：三角色合成 ES256 凭据的协议与 HTTP 边界通过，真实设备流程待本人验证。时间条件 TC-12 在 0:182 上可见：0:191 不严格在先，不算候选。分页边界（10-16 year1）：客户 13526 共 54 条，分 50＋4 两页、末页“下一页”禁用（11/12 图）；不存在商品返回空结果（14 图）。</a:t>
+              <a:t>备查：161 项是 10-18 12:44 一次统一回归；之后“已关闭隐藏”修订有 131 Go＋6 前端通过、另复跑 3 项相关 Go，Python 25 项复用；跨轮去重 162 项不是一次统一回归，15:12 末次版本未测试。10-16 时为 97 项（76 Go＋15 Python＋6 前端）。这些是本人借助工具完成的自动回归；10-15 本人测试截图为当时版本的 71 Go＋13 Python。Passkey 选择登录：三角色合成 ES256 凭据的协议与 HTTP 边界通过，设备选择流程覆盖项待补充。时间条件 TC-12 在 0:182 上可见：0:191 不严格在先，不算候选。分页边界（10-16 year1）：客户 13526 共 54 条，分 50＋4 两页、末页“下一页”禁用（11/12 图）；不存在商品返回空结果（14 图）。</a:t>
             </a:r>
           </a:p>
         </p:txBody>
